--- a/Review2_Bollu Sai Likhitha_Hybrid Recommender System for Mobiles_Final.pptx
+++ b/Review2_Bollu Sai Likhitha_Hybrid Recommender System for Mobiles_Final.pptx
@@ -3306,7 +3306,7 @@
         </p:nvSpPr>
         <p:spPr>
           <a:xfrm>
-            <a:off x="-31269" y="40623"/>
+            <a:off x="-31269" y="51509"/>
             <a:ext cx="12254538" cy="6868389"/>
           </a:xfrm>
           <a:prstGeom prst="rect">
@@ -11823,6 +11823,15 @@
 </file>
 
 <file path=customXml/item1.xml><?xml version="1.0" encoding="utf-8"?>
+<?mso-contentType ?>
+<FormTemplates xmlns="http://schemas.microsoft.com/sharepoint/v3/contenttype/forms">
+  <Display>DocumentLibraryForm</Display>
+  <Edit>DocumentLibraryForm</Edit>
+  <New>DocumentLibraryForm</New>
+</FormTemplates>
+</file>
+
+<file path=customXml/item2.xml><?xml version="1.0" encoding="utf-8"?>
 <ct:contentTypeSchema xmlns:ct="http://schemas.microsoft.com/office/2006/metadata/contentType" xmlns:ma="http://schemas.microsoft.com/office/2006/metadata/properties/metaAttributes" ct:_="" ma:_="" ma:contentTypeName="Document" ma:contentTypeID="0x0101006C65D045C369FE49BEB48825814A8E20" ma:contentTypeVersion="5" ma:contentTypeDescription="Create a new document." ma:contentTypeScope="" ma:versionID="c18cff6b4d022ab775961c191edd1d1f">
   <xsd:schema xmlns:xsd="http://www.w3.org/2001/XMLSchema" xmlns:xs="http://www.w3.org/2001/XMLSchema" xmlns:p="http://schemas.microsoft.com/office/2006/metadata/properties" xmlns:ns3="4b906143-9b70-402f-8d2b-95e67936620e" targetNamespace="http://schemas.microsoft.com/office/2006/metadata/properties" ma:root="true" ma:fieldsID="6d822b48f2c2dff57c08afe2e71b18a8" ns3:_="">
     <xsd:import namespace="4b906143-9b70-402f-8d2b-95e67936620e"/>
@@ -11972,15 +11981,6 @@
 </ct:contentTypeSchema>
 </file>
 
-<file path=customXml/item2.xml><?xml version="1.0" encoding="utf-8"?>
-<?mso-contentType ?>
-<FormTemplates xmlns="http://schemas.microsoft.com/sharepoint/v3/contenttype/forms">
-  <Display>DocumentLibraryForm</Display>
-  <Edit>DocumentLibraryForm</Edit>
-  <New>DocumentLibraryForm</New>
-</FormTemplates>
-</file>
-
 <file path=customXml/item3.xml><?xml version="1.0" encoding="utf-8"?>
 <p:properties xmlns:p="http://schemas.microsoft.com/office/2006/metadata/properties" xmlns:xsi="http://www.w3.org/2001/XMLSchema-instance" xmlns:pc="http://schemas.microsoft.com/office/infopath/2007/PartnerControls">
   <documentManagement>
@@ -11990,6 +11990,14 @@
 </file>
 
 <file path=customXml/itemProps1.xml><?xml version="1.0" encoding="utf-8"?>
+<ds:datastoreItem xmlns:ds="http://schemas.openxmlformats.org/officeDocument/2006/customXml" ds:itemID="{997884CD-CFE8-49BC-BAF2-76A32F3872B7}">
+  <ds:schemaRefs>
+    <ds:schemaRef ds:uri="http://schemas.microsoft.com/sharepoint/v3/contenttype/forms"/>
+  </ds:schemaRefs>
+</ds:datastoreItem>
+</file>
+
+<file path=customXml/itemProps2.xml><?xml version="1.0" encoding="utf-8"?>
 <ds:datastoreItem xmlns:ds="http://schemas.openxmlformats.org/officeDocument/2006/customXml" ds:itemID="{9A7A5CED-D7CC-40DC-AA52-5E05A1BE2E8D}">
   <ds:schemaRefs>
     <ds:schemaRef ds:uri="http://schemas.microsoft.com/office/2006/metadata/contentType"/>
@@ -12003,14 +12011,6 @@
     <ds:schemaRef ds:uri="http://purl.org/dc/elements/1.1/"/>
     <ds:schemaRef ds:uri="http://purl.org/dc/terms/"/>
     <ds:schemaRef ds:uri="http://schemas.microsoft.com/internal/obd"/>
-  </ds:schemaRefs>
-</ds:datastoreItem>
-</file>
-
-<file path=customXml/itemProps2.xml><?xml version="1.0" encoding="utf-8"?>
-<ds:datastoreItem xmlns:ds="http://schemas.openxmlformats.org/officeDocument/2006/customXml" ds:itemID="{997884CD-CFE8-49BC-BAF2-76A32F3872B7}">
-  <ds:schemaRefs>
-    <ds:schemaRef ds:uri="http://schemas.microsoft.com/sharepoint/v3/contenttype/forms"/>
   </ds:schemaRefs>
 </ds:datastoreItem>
 </file>
